--- a/deck/Tech4Food_Round1_SaafScan.pptx
+++ b/deck/Tech4Food_Round1_SaafScan.pptx
@@ -4387,7 +4387,7 @@
                 <a:cs typeface="DM Sans"/>
                 <a:sym typeface="DM Sans"/>
               </a:rPr>
-              <a:t>[Name] (Team Lead)</a:t>
+              <a:t>Siddhesh Kadlag (Team Lead)</a:t>
             </a:r>
             <a:endParaRPr b="0" i="0" sz="1400" u="none" cap="none" strike="noStrike">
               <a:solidFill>
@@ -4427,7 +4427,7 @@
                 <a:cs typeface="DM Sans"/>
                 <a:sym typeface="DM Sans"/>
               </a:rPr>
-              <a:t>[Name]</a:t>
+              <a:t>Harshal Pawar</a:t>
             </a:r>
             <a:endParaRPr b="0" i="0" sz="1400" u="none" cap="none" strike="noStrike">
               <a:solidFill>
@@ -4467,7 +4467,7 @@
                 <a:cs typeface="DM Sans"/>
                 <a:sym typeface="DM Sans"/>
               </a:rPr>
-              <a:t>[Name]</a:t>
+              <a:t>Prachi Kale</a:t>
             </a:r>
             <a:endParaRPr b="0" i="0" sz="1400" u="none" cap="none" strike="noStrike">
               <a:solidFill>
@@ -4785,7 +4785,7 @@
                           <a:cs typeface="DM Sans"/>
                           <a:sym typeface="DM Sans"/>
                         </a:rPr>
-                        <a:t>[ ]</a:t>
+                        <a:t>IRIS</a:t>
                       </a:r>
                       <a:endParaRPr sz="1300" u="none" cap="none" strike="noStrike">
                         <a:latin typeface="DM Sans"/>
@@ -4951,7 +4951,7 @@
                           <a:cs typeface="DM Sans"/>
                           <a:sym typeface="DM Sans"/>
                         </a:rPr>
-                        <a:t>[ ]</a:t>
+                        <a:t>Siddhesh Kadlag</a:t>
                       </a:r>
                       <a:endParaRPr sz="1300" u="none" cap="none" strike="noStrike">
                         <a:latin typeface="DM Sans"/>
@@ -5117,7 +5117,7 @@
                           <a:cs typeface="DM Sans"/>
                           <a:sym typeface="DM Sans"/>
                         </a:rPr>
-                        <a:t>[ ]</a:t>
+                        <a:t>Sapkal College of Engineering, Nashik</a:t>
                       </a:r>
                       <a:endParaRPr sz="1300" u="none" cap="none" strike="noStrike">
                         <a:latin typeface="DM Sans"/>
@@ -5449,7 +5449,7 @@
                           <a:cs typeface="DM Sans"/>
                           <a:sym typeface="DM Sans"/>
                         </a:rPr>
-                        <a:t>Both: app + test strip</a:t>
+                        <a:t>Both: Software (app) + test strip</a:t>
                       </a:r>
                       <a:endParaRPr sz="1300" u="none" cap="none" strike="noStrike">
                         <a:latin typeface="DM Sans"/>
@@ -17024,7 +17024,7 @@
                 <a:cs typeface="DM Sans"/>
                 <a:sym typeface="DM Sans"/>
               </a:rPr>
-              <a:t>[Team Name] · [Contact email]</a:t>
+              <a:t>IRIS · captainlevi252@gmail.com</a:t>
             </a:r>
             <a:endParaRPr b="0" i="0" sz="1800" u="none" cap="none" strike="noStrike">
               <a:solidFill>
